--- a/docs/img/wca-v0.pptx
+++ b/docs/img/wca-v0.pptx
@@ -3189,7 +3189,7 @@
                 </a:solidFill>
                 <a:latin typeface="Segoe UI"/>
               </a:rPr>
-              <a:t>Anna Gibaeva · v0 shipped, validated on one live WhatsApp thread · 350 tests · CI gates the eval · 9 September 2026</a:t>
+              <a:t>Anna Gibaeva · v0 shipped, validated on one live WhatsApp thread · 366 tests · CI gates the eval · 9 September 2026</a:t>
             </a:r>
           </a:p>
         </p:txBody>
@@ -4611,7 +4611,7 @@
                 </a:solidFill>
                 <a:latin typeface="Segoe UI"/>
               </a:rPr>
-              <a:t>MEASURED — twenty cases, run with the gate on and again with it off</a:t>
+              <a:t>MEASURED — 21 cases, run with the gate on and again with it off</a:t>
             </a:r>
           </a:p>
         </p:txBody>
@@ -4692,7 +4692,7 @@
                 </a:solidFill>
                 <a:latin typeface="Segoe UI"/>
               </a:rPr>
-              <a:t>0 vs 6</a:t>
+              <a:t>0 vs 5</a:t>
             </a:r>
           </a:p>
         </p:txBody>
@@ -4845,7 +4845,7 @@
                 </a:solidFill>
                 <a:latin typeface="Segoe UI"/>
               </a:rPr>
-              <a:t>4/4</a:t>
+              <a:t>6/6</a:t>
             </a:r>
           </a:p>
         </p:txBody>
